--- a/scenarios/live/deliverables/보고_장표.pptx
+++ b/scenarios/live/deliverables/보고_장표.pptx
@@ -8,6 +8,7 @@
     <p:sldId id="256" r:id="rId7"/>
     <p:sldId id="257" r:id="rId8"/>
     <p:sldId id="258" r:id="rId9"/>
+    <p:sldId id="259" r:id="rId10"/>
   </p:sldIdLst>
   <p:sldSz cx="9144000" cy="6858000" type="screen4x3"/>
   <p:notesSz cx="6858000" cy="9144000"/>
@@ -3316,6 +3317,106 @@
             </a:pPr>
             <a:r>
               <a:t>현행 프로세스·권한·인터페이스·개인정보·감사로그 근거와 책임자 확정</a:t>
+            </a:r>
+          </a:p>
+        </p:txBody>
+      </p:sp>
+    </p:spTree>
+  </p:cSld>
+  <p:clrMapOvr>
+    <a:masterClrMapping/>
+  </p:clrMapOvr>
+</p:sld>
+</file>
+
+<file path=ppt/slides/slide4.xml><?xml version="1.0" encoding="utf-8"?>
+<p:sld xmlns:a="http://schemas.openxmlformats.org/drawingml/2006/main" xmlns:p="http://schemas.openxmlformats.org/presentationml/2006/main" xmlns:r="http://schemas.openxmlformats.org/officeDocument/2006/relationships">
+  <p:cSld>
+    <p:spTree>
+      <p:nvGrpSpPr>
+        <p:cNvPr id="1" name=""/>
+        <p:cNvGrpSpPr/>
+        <p:nvPr/>
+      </p:nvGrpSpPr>
+      <p:grpSpPr/>
+      <p:sp>
+        <p:nvSpPr>
+          <p:cNvPr id="2" name="Title 1"/>
+          <p:cNvSpPr>
+            <a:spLocks noGrp="1"/>
+          </p:cNvSpPr>
+          <p:nvPr>
+            <p:ph type="title"/>
+          </p:nvPr>
+        </p:nvSpPr>
+        <p:spPr/>
+        <p:txBody>
+          <a:bodyPr/>
+          <a:lstStyle/>
+          <a:p>
+            <a:r>
+              <a:t>REQ-20260730 CO WBS 보류·PP 라우팅 및 마스터데이터 정비 승인</a:t>
+            </a:r>
+          </a:p>
+        </p:txBody>
+      </p:sp>
+      <p:sp>
+        <p:nvSpPr>
+          <p:cNvPr id="3" name="Content Placeholder 2"/>
+          <p:cNvSpPr>
+            <a:spLocks noGrp="1"/>
+          </p:cNvSpPr>
+          <p:nvPr>
+            <p:ph idx="1"/>
+          </p:nvPr>
+        </p:nvSpPr>
+        <p:spPr/>
+        <p:txBody>
+          <a:bodyPr/>
+          <a:lstStyle/>
+          <a:p>
+            <a:r>
+              <a:t>CO 내부오더 WBS 전환과 관련 개발·테스트를 보류하고 임시 운영·영향도·재검토 조건을 확정</a:t>
+            </a:r>
+          </a:p>
+          <a:p>
+            <a:pPr>
+              <a:defRPr sz="1400"/>
+            </a:pPr>
+            <a:r>
+              <a:t>계획·예산·결산·보고·인터페이스·권한 영향과 교차 모듈 의존성 분석 반영</a:t>
+            </a:r>
+          </a:p>
+          <a:p>
+            <a:pPr>
+              <a:defRPr sz="1400"/>
+            </a:pPr>
+            <a:r>
+              <a:t>PP 라우팅 표준화는 자재/BOM 중복 정비·이관 검증·승인 완료를 전제로 8월 목표 착수로만 관리</a:t>
+            </a:r>
+          </a:p>
+          <a:p>
+            <a:pPr>
+              <a:defRPr sz="1400"/>
+            </a:pPr>
+            <a:r>
+              <a:t>구코드-신코드 매핑, 이력 보존, 롤백, 원천 데이터 대조 및 차이 승인 기준 정의</a:t>
+            </a:r>
+          </a:p>
+          <a:p>
+            <a:pPr>
+              <a:defRPr sz="1400"/>
+            </a:pPr>
+            <a:r>
+              <a:t>정상·예외·중복·변경·재처리·인터페이스 시나리오와 회귀 테스트 결과를 착수·운영 전환 게이트로 지정</a:t>
+            </a:r>
+          </a:p>
+          <a:p>
+            <a:pPr>
+              <a:defRPr sz="1400"/>
+            </a:pPr>
+            <a:r>
+              <a:t>변경 승인·직무분리·접근권한·감사로그·보존기간 및 고객·운영 조직 사전 공지 책임 확정</a:t>
             </a:r>
           </a:p>
         </p:txBody>

--- a/scenarios/live/deliverables/보고_장표.pptx
+++ b/scenarios/live/deliverables/보고_장표.pptx
@@ -9,6 +9,7 @@
     <p:sldId id="257" r:id="rId8"/>
     <p:sldId id="258" r:id="rId9"/>
     <p:sldId id="259" r:id="rId10"/>
+    <p:sldId id="260" r:id="rId11"/>
   </p:sldIdLst>
   <p:sldSz cx="9144000" cy="6858000" type="screen4x3"/>
   <p:notesSz cx="6858000" cy="9144000"/>
@@ -3417,6 +3418,98 @@
             </a:pPr>
             <a:r>
               <a:t>변경 승인·직무분리·접근권한·감사로그·보존기간 및 고객·운영 조직 사전 공지 책임 확정</a:t>
+            </a:r>
+          </a:p>
+        </p:txBody>
+      </p:sp>
+    </p:spTree>
+  </p:cSld>
+  <p:clrMapOvr>
+    <a:masterClrMapping/>
+  </p:clrMapOvr>
+</p:sld>
+</file>
+
+<file path=ppt/slides/slide5.xml><?xml version="1.0" encoding="utf-8"?>
+<p:sld xmlns:a="http://schemas.openxmlformats.org/drawingml/2006/main" xmlns:p="http://schemas.openxmlformats.org/presentationml/2006/main" xmlns:r="http://schemas.openxmlformats.org/officeDocument/2006/relationships">
+  <p:cSld>
+    <p:spTree>
+      <p:nvGrpSpPr>
+        <p:cNvPr id="1" name=""/>
+        <p:cNvGrpSpPr/>
+        <p:nvPr/>
+      </p:nvGrpSpPr>
+      <p:grpSpPr/>
+      <p:sp>
+        <p:nvSpPr>
+          <p:cNvPr id="2" name="Title 1"/>
+          <p:cNvSpPr>
+            <a:spLocks noGrp="1"/>
+          </p:cNvSpPr>
+          <p:nvPr>
+            <p:ph type="title"/>
+          </p:nvPr>
+        </p:nvSpPr>
+        <p:spPr/>
+        <p:txBody>
+          <a:bodyPr/>
+          <a:lstStyle/>
+          <a:p>
+            <a:r>
+              <a:t>REQ-20260725-SD-FI-KNA1 승인 실행 및 다음 릴리즈 게이트</a:t>
+            </a:r>
+          </a:p>
+        </p:txBody>
+      </p:sp>
+      <p:sp>
+        <p:nvSpPr>
+          <p:cNvPr id="3" name="Content Placeholder 2"/>
+          <p:cNvSpPr>
+            <a:spLocks noGrp="1"/>
+          </p:cNvSpPr>
+          <p:nvPr>
+            <p:ph idx="1"/>
+          </p:nvPr>
+        </p:nvSpPr>
+        <p:spPr/>
+        <p:txBody>
+          <a:bodyPr/>
+          <a:lstStyle/>
+          <a:p>
+            <a:r>
+              <a:t>통합테스트 3차에 billing→회계전표 인터페이스 5건을 추가하고 정상·오류·경계값·재처리·중복 전표 및 세금·가격·통화·회사코드·계정결정 회귀 범위를 검증</a:t>
+            </a:r>
+          </a:p>
+          <a:p>
+            <a:pPr>
+              <a:defRPr sz="1400"/>
+            </a:pPr>
+            <a:r>
+              <a:t>W-102 KNA1 신규 필드의 필수·기본값·허용값·길이·형식·변환·누락·오류 처리와 멱등성·중복 방지·재전송·부분 성공·보상 기준 확정</a:t>
+            </a:r>
+          </a:p>
+          <a:p>
+            <a:pPr>
+              <a:defRPr sz="1400"/>
+            </a:pPr>
+            <a:r>
+              <a:t>KNA1 개인정보 여부, 접근권한·마스킹·보존·감사로그·법적 근거·처리 목적·DPIA·고객 통지 필요성 검토</a:t>
+            </a:r>
+          </a:p>
+          <a:p>
+            <a:pPr>
+              <a:defRPr sz="1400"/>
+            </a:pPr>
+            <a:r>
+              <a:t>홍길동 실무 담당자와 승인자·개발·테스트·배포 책임자 및 변경관리 추적 식별자 확정</a:t>
+            </a:r>
+          </a:p>
+          <a:p>
+            <a:pPr>
+              <a:defRPr sz="1400"/>
+            </a:pPr>
+            <a:r>
+              <a:t>최종 승인 기준과 세부 설계 확정 전 개발·테스트·배포를 확정하지 않고 승인 게이트 통과 범위만 다음 릴리즈에 반영</a:t>
             </a:r>
           </a:p>
         </p:txBody>
